--- a/module-03-grid-driving/slides/01-introduction-to-the-grid.pptx
+++ b/module-03-grid-driving/slides/01-introduction-to-the-grid.pptx
@@ -5,18 +5,18 @@
     <p:sldMasterId id="2147483648" r:id="rId1"/>
   </p:sldMasterIdLst>
   <p:sldIdLst>
-    <p:sldId id="256" r:id="rId7"/>
-    <p:sldId id="257" r:id="rId8"/>
-    <p:sldId id="258" r:id="rId9"/>
-    <p:sldId id="259" r:id="rId10"/>
-    <p:sldId id="260" r:id="rId11"/>
-    <p:sldId id="261" r:id="rId12"/>
-    <p:sldId id="262" r:id="rId13"/>
-    <p:sldId id="263" r:id="rId14"/>
-    <p:sldId id="264" r:id="rId15"/>
-    <p:sldId id="265" r:id="rId16"/>
+    <p:sldId id="256" r:id="rId2"/>
+    <p:sldId id="257" r:id="rId3"/>
+    <p:sldId id="258" r:id="rId4"/>
+    <p:sldId id="259" r:id="rId5"/>
+    <p:sldId id="260" r:id="rId6"/>
+    <p:sldId id="261" r:id="rId7"/>
+    <p:sldId id="262" r:id="rId8"/>
+    <p:sldId id="263" r:id="rId9"/>
+    <p:sldId id="264" r:id="rId10"/>
+    <p:sldId id="265" r:id="rId11"/>
   </p:sldIdLst>
-  <p:sldSz cx="12191695" cy="6858000" type="screen4x3"/>
+  <p:sldSz cx="12192000" cy="6858000"/>
   <p:notesSz cx="6858000" cy="9144000"/>
   <p:defaultTextStyle>
     <a:defPPr>
@@ -113,6 +113,22 @@
       </a:defRPr>
     </a:lvl9pPr>
   </p:defaultTextStyle>
+  <p:extLst>
+    <p:ext uri="{EFAFB233-063F-42B5-8137-9DF3F51BA10A}">
+      <p15:sldGuideLst xmlns:p15="http://schemas.microsoft.com/office/powerpoint/2012/main">
+        <p15:guide id="1" orient="horz" pos="2160">
+          <p15:clr>
+            <a:srgbClr val="A4A3A4"/>
+          </p15:clr>
+        </p15:guide>
+        <p15:guide id="2" pos="2880">
+          <p15:clr>
+            <a:srgbClr val="A4A3A4"/>
+          </p15:clr>
+        </p15:guide>
+      </p15:sldGuideLst>
+    </p:ext>
+  </p:extLst>
 </p:presentation>
 </file>
 
@@ -154,10 +170,9 @@
           <a:lstStyle/>
           <a:p>
             <a:r>
-              <a:rPr lang="en-US" smtClean="0"/>
+              <a:rPr lang="en-US"/>
               <a:t>Click to edit Master title style</a:t>
             </a:r>
-            <a:endParaRPr lang="en-US"/>
           </a:p>
         </p:txBody>
       </p:sp>
@@ -273,10 +288,9 @@
           </a:lstStyle>
           <a:p>
             <a:r>
-              <a:rPr lang="en-US" smtClean="0"/>
+              <a:rPr lang="en-US"/>
               <a:t>Click to edit Master subtitle style</a:t>
             </a:r>
-            <a:endParaRPr lang="en-US"/>
           </a:p>
         </p:txBody>
       </p:sp>
@@ -297,7 +311,7 @@
           <a:p>
             <a:fld id="{5BCAD085-E8A6-8845-BD4E-CB4CCA059FC4}" type="datetimeFigureOut">
               <a:rPr lang="en-US" smtClean="0"/>
-              <a:t>1/27/13</a:t>
+              <a:t>3/20/26</a:t>
             </a:fld>
             <a:endParaRPr lang="en-US"/>
           </a:p>
@@ -391,10 +405,9 @@
           <a:lstStyle/>
           <a:p>
             <a:r>
-              <a:rPr lang="en-US" smtClean="0"/>
+              <a:rPr lang="en-US"/>
               <a:t>Click to edit Master title style</a:t>
             </a:r>
-            <a:endParaRPr lang="en-US"/>
           </a:p>
         </p:txBody>
       </p:sp>
@@ -415,38 +428,37 @@
           <a:p>
             <a:pPr lvl="0"/>
             <a:r>
-              <a:rPr lang="en-US" smtClean="0"/>
+              <a:rPr lang="en-US"/>
               <a:t>Click to edit Master text styles</a:t>
             </a:r>
           </a:p>
           <a:p>
             <a:pPr lvl="1"/>
             <a:r>
-              <a:rPr lang="en-US" smtClean="0"/>
+              <a:rPr lang="en-US"/>
               <a:t>Second level</a:t>
             </a:r>
           </a:p>
           <a:p>
             <a:pPr lvl="2"/>
             <a:r>
-              <a:rPr lang="en-US" smtClean="0"/>
+              <a:rPr lang="en-US"/>
               <a:t>Third level</a:t>
             </a:r>
           </a:p>
           <a:p>
             <a:pPr lvl="3"/>
             <a:r>
-              <a:rPr lang="en-US" smtClean="0"/>
+              <a:rPr lang="en-US"/>
               <a:t>Fourth level</a:t>
             </a:r>
           </a:p>
           <a:p>
             <a:pPr lvl="4"/>
             <a:r>
-              <a:rPr lang="en-US" smtClean="0"/>
+              <a:rPr lang="en-US"/>
               <a:t>Fifth level</a:t>
             </a:r>
-            <a:endParaRPr lang="en-US"/>
           </a:p>
         </p:txBody>
       </p:sp>
@@ -467,7 +479,7 @@
           <a:p>
             <a:fld id="{5BCAD085-E8A6-8845-BD4E-CB4CCA059FC4}" type="datetimeFigureOut">
               <a:rPr lang="en-US" smtClean="0"/>
-              <a:t>1/27/13</a:t>
+              <a:t>3/20/26</a:t>
             </a:fld>
             <a:endParaRPr lang="en-US"/>
           </a:p>
@@ -566,10 +578,9 @@
           <a:lstStyle/>
           <a:p>
             <a:r>
-              <a:rPr lang="en-US" smtClean="0"/>
+              <a:rPr lang="en-US"/>
               <a:t>Click to edit Master title style</a:t>
             </a:r>
-            <a:endParaRPr lang="en-US"/>
           </a:p>
         </p:txBody>
       </p:sp>
@@ -595,38 +606,37 @@
           <a:p>
             <a:pPr lvl="0"/>
             <a:r>
-              <a:rPr lang="en-US" smtClean="0"/>
+              <a:rPr lang="en-US"/>
               <a:t>Click to edit Master text styles</a:t>
             </a:r>
           </a:p>
           <a:p>
             <a:pPr lvl="1"/>
             <a:r>
-              <a:rPr lang="en-US" smtClean="0"/>
+              <a:rPr lang="en-US"/>
               <a:t>Second level</a:t>
             </a:r>
           </a:p>
           <a:p>
             <a:pPr lvl="2"/>
             <a:r>
-              <a:rPr lang="en-US" smtClean="0"/>
+              <a:rPr lang="en-US"/>
               <a:t>Third level</a:t>
             </a:r>
           </a:p>
           <a:p>
             <a:pPr lvl="3"/>
             <a:r>
-              <a:rPr lang="en-US" smtClean="0"/>
+              <a:rPr lang="en-US"/>
               <a:t>Fourth level</a:t>
             </a:r>
           </a:p>
           <a:p>
             <a:pPr lvl="4"/>
             <a:r>
-              <a:rPr lang="en-US" smtClean="0"/>
+              <a:rPr lang="en-US"/>
               <a:t>Fifth level</a:t>
             </a:r>
-            <a:endParaRPr lang="en-US"/>
           </a:p>
         </p:txBody>
       </p:sp>
@@ -647,7 +657,7 @@
           <a:p>
             <a:fld id="{5BCAD085-E8A6-8845-BD4E-CB4CCA059FC4}" type="datetimeFigureOut">
               <a:rPr lang="en-US" smtClean="0"/>
-              <a:t>1/27/13</a:t>
+              <a:t>3/20/26</a:t>
             </a:fld>
             <a:endParaRPr lang="en-US"/>
           </a:p>
@@ -741,10 +751,9 @@
           <a:lstStyle/>
           <a:p>
             <a:r>
-              <a:rPr lang="en-US" smtClean="0"/>
+              <a:rPr lang="en-US"/>
               <a:t>Click to edit Master title style</a:t>
             </a:r>
-            <a:endParaRPr lang="en-US"/>
           </a:p>
         </p:txBody>
       </p:sp>
@@ -765,38 +774,37 @@
           <a:p>
             <a:pPr lvl="0"/>
             <a:r>
-              <a:rPr lang="en-US" smtClean="0"/>
+              <a:rPr lang="en-US"/>
               <a:t>Click to edit Master text styles</a:t>
             </a:r>
           </a:p>
           <a:p>
             <a:pPr lvl="1"/>
             <a:r>
-              <a:rPr lang="en-US" smtClean="0"/>
+              <a:rPr lang="en-US"/>
               <a:t>Second level</a:t>
             </a:r>
           </a:p>
           <a:p>
             <a:pPr lvl="2"/>
             <a:r>
-              <a:rPr lang="en-US" smtClean="0"/>
+              <a:rPr lang="en-US"/>
               <a:t>Third level</a:t>
             </a:r>
           </a:p>
           <a:p>
             <a:pPr lvl="3"/>
             <a:r>
-              <a:rPr lang="en-US" smtClean="0"/>
+              <a:rPr lang="en-US"/>
               <a:t>Fourth level</a:t>
             </a:r>
           </a:p>
           <a:p>
             <a:pPr lvl="4"/>
             <a:r>
-              <a:rPr lang="en-US" smtClean="0"/>
+              <a:rPr lang="en-US"/>
               <a:t>Fifth level</a:t>
             </a:r>
-            <a:endParaRPr lang="en-US"/>
           </a:p>
         </p:txBody>
       </p:sp>
@@ -817,7 +825,7 @@
           <a:p>
             <a:fld id="{5BCAD085-E8A6-8845-BD4E-CB4CCA059FC4}" type="datetimeFigureOut">
               <a:rPr lang="en-US" smtClean="0"/>
-              <a:t>1/27/13</a:t>
+              <a:t>3/20/26</a:t>
             </a:fld>
             <a:endParaRPr lang="en-US"/>
           </a:p>
@@ -920,10 +928,9 @@
           </a:lstStyle>
           <a:p>
             <a:r>
-              <a:rPr lang="en-US" smtClean="0"/>
+              <a:rPr lang="en-US"/>
               <a:t>Click to edit Master title style</a:t>
             </a:r>
-            <a:endParaRPr lang="en-US"/>
           </a:p>
         </p:txBody>
       </p:sp>
@@ -1040,7 +1047,7 @@
           <a:p>
             <a:pPr lvl="0"/>
             <a:r>
-              <a:rPr lang="en-US" smtClean="0"/>
+              <a:rPr lang="en-US"/>
               <a:t>Click to edit Master text styles</a:t>
             </a:r>
           </a:p>
@@ -1063,7 +1070,7 @@
           <a:p>
             <a:fld id="{5BCAD085-E8A6-8845-BD4E-CB4CCA059FC4}" type="datetimeFigureOut">
               <a:rPr lang="en-US" smtClean="0"/>
-              <a:t>1/27/13</a:t>
+              <a:t>3/20/26</a:t>
             </a:fld>
             <a:endParaRPr lang="en-US"/>
           </a:p>
@@ -1157,10 +1164,9 @@
           <a:lstStyle/>
           <a:p>
             <a:r>
-              <a:rPr lang="en-US" smtClean="0"/>
+              <a:rPr lang="en-US"/>
               <a:t>Click to edit Master title style</a:t>
             </a:r>
-            <a:endParaRPr lang="en-US"/>
           </a:p>
         </p:txBody>
       </p:sp>
@@ -1214,38 +1220,37 @@
           <a:p>
             <a:pPr lvl="0"/>
             <a:r>
-              <a:rPr lang="en-US" smtClean="0"/>
+              <a:rPr lang="en-US"/>
               <a:t>Click to edit Master text styles</a:t>
             </a:r>
           </a:p>
           <a:p>
             <a:pPr lvl="1"/>
             <a:r>
-              <a:rPr lang="en-US" smtClean="0"/>
+              <a:rPr lang="en-US"/>
               <a:t>Second level</a:t>
             </a:r>
           </a:p>
           <a:p>
             <a:pPr lvl="2"/>
             <a:r>
-              <a:rPr lang="en-US" smtClean="0"/>
+              <a:rPr lang="en-US"/>
               <a:t>Third level</a:t>
             </a:r>
           </a:p>
           <a:p>
             <a:pPr lvl="3"/>
             <a:r>
-              <a:rPr lang="en-US" smtClean="0"/>
+              <a:rPr lang="en-US"/>
               <a:t>Fourth level</a:t>
             </a:r>
           </a:p>
           <a:p>
             <a:pPr lvl="4"/>
             <a:r>
-              <a:rPr lang="en-US" smtClean="0"/>
+              <a:rPr lang="en-US"/>
               <a:t>Fifth level</a:t>
             </a:r>
-            <a:endParaRPr lang="en-US"/>
           </a:p>
         </p:txBody>
       </p:sp>
@@ -1299,38 +1304,37 @@
           <a:p>
             <a:pPr lvl="0"/>
             <a:r>
-              <a:rPr lang="en-US" smtClean="0"/>
+              <a:rPr lang="en-US"/>
               <a:t>Click to edit Master text styles</a:t>
             </a:r>
           </a:p>
           <a:p>
             <a:pPr lvl="1"/>
             <a:r>
-              <a:rPr lang="en-US" smtClean="0"/>
+              <a:rPr lang="en-US"/>
               <a:t>Second level</a:t>
             </a:r>
           </a:p>
           <a:p>
             <a:pPr lvl="2"/>
             <a:r>
-              <a:rPr lang="en-US" smtClean="0"/>
+              <a:rPr lang="en-US"/>
               <a:t>Third level</a:t>
             </a:r>
           </a:p>
           <a:p>
             <a:pPr lvl="3"/>
             <a:r>
-              <a:rPr lang="en-US" smtClean="0"/>
+              <a:rPr lang="en-US"/>
               <a:t>Fourth level</a:t>
             </a:r>
           </a:p>
           <a:p>
             <a:pPr lvl="4"/>
             <a:r>
-              <a:rPr lang="en-US" smtClean="0"/>
+              <a:rPr lang="en-US"/>
               <a:t>Fifth level</a:t>
             </a:r>
-            <a:endParaRPr lang="en-US"/>
           </a:p>
         </p:txBody>
       </p:sp>
@@ -1351,7 +1355,7 @@
           <a:p>
             <a:fld id="{5BCAD085-E8A6-8845-BD4E-CB4CCA059FC4}" type="datetimeFigureOut">
               <a:rPr lang="en-US" smtClean="0"/>
-              <a:t>1/27/13</a:t>
+              <a:t>3/20/26</a:t>
             </a:fld>
             <a:endParaRPr lang="en-US"/>
           </a:p>
@@ -1449,10 +1453,9 @@
           </a:lstStyle>
           <a:p>
             <a:r>
-              <a:rPr lang="en-US" smtClean="0"/>
+              <a:rPr lang="en-US"/>
               <a:t>Click to edit Master title style</a:t>
             </a:r>
-            <a:endParaRPr lang="en-US"/>
           </a:p>
         </p:txBody>
       </p:sp>
@@ -1515,7 +1518,7 @@
           <a:p>
             <a:pPr lvl="0"/>
             <a:r>
-              <a:rPr lang="en-US" smtClean="0"/>
+              <a:rPr lang="en-US"/>
               <a:t>Click to edit Master text styles</a:t>
             </a:r>
           </a:p>
@@ -1571,38 +1574,37 @@
           <a:p>
             <a:pPr lvl="0"/>
             <a:r>
-              <a:rPr lang="en-US" smtClean="0"/>
+              <a:rPr lang="en-US"/>
               <a:t>Click to edit Master text styles</a:t>
             </a:r>
           </a:p>
           <a:p>
             <a:pPr lvl="1"/>
             <a:r>
-              <a:rPr lang="en-US" smtClean="0"/>
+              <a:rPr lang="en-US"/>
               <a:t>Second level</a:t>
             </a:r>
           </a:p>
           <a:p>
             <a:pPr lvl="2"/>
             <a:r>
-              <a:rPr lang="en-US" smtClean="0"/>
+              <a:rPr lang="en-US"/>
               <a:t>Third level</a:t>
             </a:r>
           </a:p>
           <a:p>
             <a:pPr lvl="3"/>
             <a:r>
-              <a:rPr lang="en-US" smtClean="0"/>
+              <a:rPr lang="en-US"/>
               <a:t>Fourth level</a:t>
             </a:r>
           </a:p>
           <a:p>
             <a:pPr lvl="4"/>
             <a:r>
-              <a:rPr lang="en-US" smtClean="0"/>
+              <a:rPr lang="en-US"/>
               <a:t>Fifth level</a:t>
             </a:r>
-            <a:endParaRPr lang="en-US"/>
           </a:p>
         </p:txBody>
       </p:sp>
@@ -1665,7 +1667,7 @@
           <a:p>
             <a:pPr lvl="0"/>
             <a:r>
-              <a:rPr lang="en-US" smtClean="0"/>
+              <a:rPr lang="en-US"/>
               <a:t>Click to edit Master text styles</a:t>
             </a:r>
           </a:p>
@@ -1721,38 +1723,37 @@
           <a:p>
             <a:pPr lvl="0"/>
             <a:r>
-              <a:rPr lang="en-US" smtClean="0"/>
+              <a:rPr lang="en-US"/>
               <a:t>Click to edit Master text styles</a:t>
             </a:r>
           </a:p>
           <a:p>
             <a:pPr lvl="1"/>
             <a:r>
-              <a:rPr lang="en-US" smtClean="0"/>
+              <a:rPr lang="en-US"/>
               <a:t>Second level</a:t>
             </a:r>
           </a:p>
           <a:p>
             <a:pPr lvl="2"/>
             <a:r>
-              <a:rPr lang="en-US" smtClean="0"/>
+              <a:rPr lang="en-US"/>
               <a:t>Third level</a:t>
             </a:r>
           </a:p>
           <a:p>
             <a:pPr lvl="3"/>
             <a:r>
-              <a:rPr lang="en-US" smtClean="0"/>
+              <a:rPr lang="en-US"/>
               <a:t>Fourth level</a:t>
             </a:r>
           </a:p>
           <a:p>
             <a:pPr lvl="4"/>
             <a:r>
-              <a:rPr lang="en-US" smtClean="0"/>
+              <a:rPr lang="en-US"/>
               <a:t>Fifth level</a:t>
             </a:r>
-            <a:endParaRPr lang="en-US"/>
           </a:p>
         </p:txBody>
       </p:sp>
@@ -1773,7 +1774,7 @@
           <a:p>
             <a:fld id="{5BCAD085-E8A6-8845-BD4E-CB4CCA059FC4}" type="datetimeFigureOut">
               <a:rPr lang="en-US" smtClean="0"/>
-              <a:t>1/27/13</a:t>
+              <a:t>3/20/26</a:t>
             </a:fld>
             <a:endParaRPr lang="en-US"/>
           </a:p>
@@ -1867,10 +1868,9 @@
           <a:lstStyle/>
           <a:p>
             <a:r>
-              <a:rPr lang="en-US" smtClean="0"/>
+              <a:rPr lang="en-US"/>
               <a:t>Click to edit Master title style</a:t>
             </a:r>
-            <a:endParaRPr lang="en-US"/>
           </a:p>
         </p:txBody>
       </p:sp>
@@ -1891,7 +1891,7 @@
           <a:p>
             <a:fld id="{5BCAD085-E8A6-8845-BD4E-CB4CCA059FC4}" type="datetimeFigureOut">
               <a:rPr lang="en-US" smtClean="0"/>
-              <a:t>1/27/13</a:t>
+              <a:t>3/20/26</a:t>
             </a:fld>
             <a:endParaRPr lang="en-US"/>
           </a:p>
@@ -1986,7 +1986,7 @@
           <a:p>
             <a:fld id="{5BCAD085-E8A6-8845-BD4E-CB4CCA059FC4}" type="datetimeFigureOut">
               <a:rPr lang="en-US" smtClean="0"/>
-              <a:t>1/27/13</a:t>
+              <a:t>3/20/26</a:t>
             </a:fld>
             <a:endParaRPr lang="en-US"/>
           </a:p>
@@ -2089,10 +2089,9 @@
           </a:lstStyle>
           <a:p>
             <a:r>
-              <a:rPr lang="en-US" smtClean="0"/>
+              <a:rPr lang="en-US"/>
               <a:t>Click to edit Master title style</a:t>
             </a:r>
-            <a:endParaRPr lang="en-US"/>
           </a:p>
         </p:txBody>
       </p:sp>
@@ -2146,38 +2145,37 @@
           <a:p>
             <a:pPr lvl="0"/>
             <a:r>
-              <a:rPr lang="en-US" smtClean="0"/>
+              <a:rPr lang="en-US"/>
               <a:t>Click to edit Master text styles</a:t>
             </a:r>
           </a:p>
           <a:p>
             <a:pPr lvl="1"/>
             <a:r>
-              <a:rPr lang="en-US" smtClean="0"/>
+              <a:rPr lang="en-US"/>
               <a:t>Second level</a:t>
             </a:r>
           </a:p>
           <a:p>
             <a:pPr lvl="2"/>
             <a:r>
-              <a:rPr lang="en-US" smtClean="0"/>
+              <a:rPr lang="en-US"/>
               <a:t>Third level</a:t>
             </a:r>
           </a:p>
           <a:p>
             <a:pPr lvl="3"/>
             <a:r>
-              <a:rPr lang="en-US" smtClean="0"/>
+              <a:rPr lang="en-US"/>
               <a:t>Fourth level</a:t>
             </a:r>
           </a:p>
           <a:p>
             <a:pPr lvl="4"/>
             <a:r>
-              <a:rPr lang="en-US" smtClean="0"/>
+              <a:rPr lang="en-US"/>
               <a:t>Fifth level</a:t>
             </a:r>
-            <a:endParaRPr lang="en-US"/>
           </a:p>
         </p:txBody>
       </p:sp>
@@ -2240,7 +2238,7 @@
           <a:p>
             <a:pPr lvl="0"/>
             <a:r>
-              <a:rPr lang="en-US" smtClean="0"/>
+              <a:rPr lang="en-US"/>
               <a:t>Click to edit Master text styles</a:t>
             </a:r>
           </a:p>
@@ -2263,7 +2261,7 @@
           <a:p>
             <a:fld id="{5BCAD085-E8A6-8845-BD4E-CB4CCA059FC4}" type="datetimeFigureOut">
               <a:rPr lang="en-US" smtClean="0"/>
-              <a:t>1/27/13</a:t>
+              <a:t>3/20/26</a:t>
             </a:fld>
             <a:endParaRPr lang="en-US"/>
           </a:p>
@@ -2366,10 +2364,9 @@
           </a:lstStyle>
           <a:p>
             <a:r>
-              <a:rPr lang="en-US" smtClean="0"/>
+              <a:rPr lang="en-US"/>
               <a:t>Click to edit Master title style</a:t>
             </a:r>
-            <a:endParaRPr lang="en-US"/>
           </a:p>
         </p:txBody>
       </p:sp>
@@ -2493,7 +2490,7 @@
           <a:p>
             <a:pPr lvl="0"/>
             <a:r>
-              <a:rPr lang="en-US" smtClean="0"/>
+              <a:rPr lang="en-US"/>
               <a:t>Click to edit Master text styles</a:t>
             </a:r>
           </a:p>
@@ -2516,7 +2513,7 @@
           <a:p>
             <a:fld id="{5BCAD085-E8A6-8845-BD4E-CB4CCA059FC4}" type="datetimeFigureOut">
               <a:rPr lang="en-US" smtClean="0"/>
-              <a:t>1/27/13</a:t>
+              <a:t>3/20/26</a:t>
             </a:fld>
             <a:endParaRPr lang="en-US"/>
           </a:p>
@@ -2625,10 +2622,9 @@
           <a:lstStyle/>
           <a:p>
             <a:r>
-              <a:rPr lang="en-US" smtClean="0"/>
+              <a:rPr lang="en-US"/>
               <a:t>Click to edit Master title style</a:t>
             </a:r>
-            <a:endParaRPr lang="en-US"/>
           </a:p>
         </p:txBody>
       </p:sp>
@@ -2659,38 +2655,37 @@
           <a:p>
             <a:pPr lvl="0"/>
             <a:r>
-              <a:rPr lang="en-US" smtClean="0"/>
+              <a:rPr lang="en-US"/>
               <a:t>Click to edit Master text styles</a:t>
             </a:r>
           </a:p>
           <a:p>
             <a:pPr lvl="1"/>
             <a:r>
-              <a:rPr lang="en-US" smtClean="0"/>
+              <a:rPr lang="en-US"/>
               <a:t>Second level</a:t>
             </a:r>
           </a:p>
           <a:p>
             <a:pPr lvl="2"/>
             <a:r>
-              <a:rPr lang="en-US" smtClean="0"/>
+              <a:rPr lang="en-US"/>
               <a:t>Third level</a:t>
             </a:r>
           </a:p>
           <a:p>
             <a:pPr lvl="3"/>
             <a:r>
-              <a:rPr lang="en-US" smtClean="0"/>
+              <a:rPr lang="en-US"/>
               <a:t>Fourth level</a:t>
             </a:r>
           </a:p>
           <a:p>
             <a:pPr lvl="4"/>
             <a:r>
-              <a:rPr lang="en-US" smtClean="0"/>
+              <a:rPr lang="en-US"/>
               <a:t>Fifth level</a:t>
             </a:r>
-            <a:endParaRPr lang="en-US"/>
           </a:p>
         </p:txBody>
       </p:sp>
@@ -2729,7 +2724,7 @@
           <a:p>
             <a:fld id="{5BCAD085-E8A6-8845-BD4E-CB4CCA059FC4}" type="datetimeFigureOut">
               <a:rPr lang="en-US" smtClean="0"/>
-              <a:t>1/27/13</a:t>
+              <a:t>3/20/26</a:t>
             </a:fld>
             <a:endParaRPr lang="en-US"/>
           </a:p>
@@ -3088,7 +3083,7 @@
 </file>
 
 <file path=ppt/slides/slide1.xml><?xml version="1.0" encoding="utf-8"?>
-<p:sld xmlns:a="http://schemas.openxmlformats.org/drawingml/2006/main" xmlns:p="http://schemas.openxmlformats.org/presentationml/2006/main" xmlns:r="http://schemas.openxmlformats.org/officeDocument/2006/relationships">
+<p:sld xmlns:a="http://schemas.openxmlformats.org/drawingml/2006/main" xmlns:r="http://schemas.openxmlformats.org/officeDocument/2006/relationships" xmlns:p="http://schemas.openxmlformats.org/presentationml/2006/main">
   <p:cSld>
     <p:spTree>
       <p:nvGrpSpPr>
@@ -3096,7 +3091,14 @@
         <p:cNvGrpSpPr/>
         <p:nvPr/>
       </p:nvGrpSpPr>
-      <p:grpSpPr/>
+      <p:grpSpPr>
+        <a:xfrm>
+          <a:off x="0" y="0"/>
+          <a:ext cx="0" cy="0"/>
+          <a:chOff x="0" y="0"/>
+          <a:chExt cx="0" cy="0"/>
+        </a:xfrm>
+      </p:grpSpPr>
       <p:sp>
         <p:nvSpPr>
           <p:cNvPr id="2" name="Rectangle 1"/>
@@ -3137,6 +3139,7 @@
           <a:lstStyle/>
           <a:p>
             <a:pPr algn="ctr"/>
+            <a:endParaRPr/>
           </a:p>
         </p:txBody>
       </p:sp>
@@ -3421,7 +3424,7 @@
 </file>
 
 <file path=ppt/slides/slide10.xml><?xml version="1.0" encoding="utf-8"?>
-<p:sld xmlns:a="http://schemas.openxmlformats.org/drawingml/2006/main" xmlns:p="http://schemas.openxmlformats.org/presentationml/2006/main" xmlns:r="http://schemas.openxmlformats.org/officeDocument/2006/relationships">
+<p:sld xmlns:a="http://schemas.openxmlformats.org/drawingml/2006/main" xmlns:r="http://schemas.openxmlformats.org/officeDocument/2006/relationships" xmlns:p="http://schemas.openxmlformats.org/presentationml/2006/main">
   <p:cSld>
     <p:spTree>
       <p:nvGrpSpPr>
@@ -3429,7 +3432,14 @@
         <p:cNvGrpSpPr/>
         <p:nvPr/>
       </p:nvGrpSpPr>
-      <p:grpSpPr/>
+      <p:grpSpPr>
+        <a:xfrm>
+          <a:off x="0" y="0"/>
+          <a:ext cx="0" cy="0"/>
+          <a:chOff x="0" y="0"/>
+          <a:chExt cx="0" cy="0"/>
+        </a:xfrm>
+      </p:grpSpPr>
       <p:sp>
         <p:nvSpPr>
           <p:cNvPr id="2" name="Rectangle 1"/>
@@ -3470,6 +3480,7 @@
           <a:lstStyle/>
           <a:p>
             <a:pPr algn="ctr"/>
+            <a:endParaRPr/>
           </a:p>
         </p:txBody>
       </p:sp>
@@ -3606,6 +3617,7 @@
                 <a:latin typeface="Calibri"/>
               </a:defRPr>
             </a:pPr>
+            <a:endParaRPr/>
           </a:p>
           <a:p>
             <a:pPr>
@@ -3683,6 +3695,7 @@
                 <a:latin typeface="Calibri"/>
               </a:defRPr>
             </a:pPr>
+            <a:endParaRPr/>
           </a:p>
           <a:p>
             <a:pPr>
@@ -3711,7 +3724,7 @@
 </file>
 
 <file path=ppt/slides/slide2.xml><?xml version="1.0" encoding="utf-8"?>
-<p:sld xmlns:a="http://schemas.openxmlformats.org/drawingml/2006/main" xmlns:p="http://schemas.openxmlformats.org/presentationml/2006/main" xmlns:r="http://schemas.openxmlformats.org/officeDocument/2006/relationships">
+<p:sld xmlns:a="http://schemas.openxmlformats.org/drawingml/2006/main" xmlns:r="http://schemas.openxmlformats.org/officeDocument/2006/relationships" xmlns:p="http://schemas.openxmlformats.org/presentationml/2006/main">
   <p:cSld>
     <p:spTree>
       <p:nvGrpSpPr>
@@ -3719,7 +3732,14 @@
         <p:cNvGrpSpPr/>
         <p:nvPr/>
       </p:nvGrpSpPr>
-      <p:grpSpPr/>
+      <p:grpSpPr>
+        <a:xfrm>
+          <a:off x="0" y="0"/>
+          <a:ext cx="0" cy="0"/>
+          <a:chOff x="0" y="0"/>
+          <a:chExt cx="0" cy="0"/>
+        </a:xfrm>
+      </p:grpSpPr>
       <p:sp>
         <p:nvSpPr>
           <p:cNvPr id="2" name="Rectangle 1"/>
@@ -3760,6 +3780,7 @@
           <a:lstStyle/>
           <a:p>
             <a:pPr algn="ctr"/>
+            <a:endParaRPr/>
           </a:p>
         </p:txBody>
       </p:sp>
@@ -3864,6 +3885,7 @@
                 <a:latin typeface="Calibri"/>
               </a:defRPr>
             </a:pPr>
+            <a:endParaRPr/>
           </a:p>
           <a:p>
             <a:pPr>
@@ -3941,6 +3963,7 @@
                 <a:latin typeface="Calibri"/>
               </a:defRPr>
             </a:pPr>
+            <a:endParaRPr/>
           </a:p>
           <a:p>
             <a:pPr>
@@ -3970,6 +3993,7 @@
                 <a:latin typeface="Calibri"/>
               </a:defRPr>
             </a:pPr>
+            <a:endParaRPr/>
           </a:p>
           <a:p>
             <a:pPr>
@@ -3999,6 +4023,7 @@
                 <a:latin typeface="Calibri"/>
               </a:defRPr>
             </a:pPr>
+            <a:endParaRPr/>
           </a:p>
         </p:txBody>
       </p:sp>
@@ -4011,7 +4036,7 @@
 </file>
 
 <file path=ppt/slides/slide3.xml><?xml version="1.0" encoding="utf-8"?>
-<p:sld xmlns:a="http://schemas.openxmlformats.org/drawingml/2006/main" xmlns:p="http://schemas.openxmlformats.org/presentationml/2006/main" xmlns:r="http://schemas.openxmlformats.org/officeDocument/2006/relationships">
+<p:sld xmlns:a="http://schemas.openxmlformats.org/drawingml/2006/main" xmlns:r="http://schemas.openxmlformats.org/officeDocument/2006/relationships" xmlns:p="http://schemas.openxmlformats.org/presentationml/2006/main">
   <p:cSld>
     <p:spTree>
       <p:nvGrpSpPr>
@@ -4019,7 +4044,14 @@
         <p:cNvGrpSpPr/>
         <p:nvPr/>
       </p:nvGrpSpPr>
-      <p:grpSpPr/>
+      <p:grpSpPr>
+        <a:xfrm>
+          <a:off x="0" y="0"/>
+          <a:ext cx="0" cy="0"/>
+          <a:chOff x="0" y="0"/>
+          <a:chExt cx="0" cy="0"/>
+        </a:xfrm>
+      </p:grpSpPr>
       <p:sp>
         <p:nvSpPr>
           <p:cNvPr id="2" name="Rectangle 1"/>
@@ -4060,6 +4092,7 @@
           <a:lstStyle/>
           <a:p>
             <a:pPr algn="ctr"/>
+            <a:endParaRPr/>
           </a:p>
         </p:txBody>
       </p:sp>
@@ -4148,6 +4181,7 @@
                 <a:latin typeface="Calibri"/>
               </a:defRPr>
             </a:pPr>
+            <a:endParaRPr/>
           </a:p>
         </p:txBody>
       </p:sp>
@@ -4157,10 +4191,16 @@
           <p:cNvGraphicFramePr>
             <a:graphicFrameLocks noGrp="1"/>
           </p:cNvGraphicFramePr>
-          <p:nvPr/>
+          <p:nvPr>
+            <p:extLst>
+              <p:ext uri="{D42A27DB-BD31-4B8C-83A1-F6EECF244321}">
+                <p14:modId xmlns:p14="http://schemas.microsoft.com/office/powerpoint/2010/main" val="2354120848"/>
+              </p:ext>
+            </p:extLst>
+          </p:nvPr>
         </p:nvGraphicFramePr>
         <p:xfrm>
-          <a:off x="914400" y="1371600"/>
+          <a:off x="548640" y="1869204"/>
           <a:ext cx="10058400" cy="1828800"/>
         </p:xfrm>
         <a:graphic>
@@ -4170,11 +4210,41 @@
                 <a:tableStyleId>{5C22544A-7EE6-4342-B048-85BDC9FD1C3A}</a:tableStyleId>
               </a:tblPr>
               <a:tblGrid>
-                <a:gridCol w="2011680"/>
-                <a:gridCol w="2011680"/>
-                <a:gridCol w="2011680"/>
-                <a:gridCol w="2011680"/>
-                <a:gridCol w="2011680"/>
+                <a:gridCol w="2011680">
+                  <a:extLst>
+                    <a:ext uri="{9D8B030D-6E8A-4147-A177-3AD203B41FA5}">
+                      <a16:colId xmlns:a16="http://schemas.microsoft.com/office/drawing/2014/main" val="20000"/>
+                    </a:ext>
+                  </a:extLst>
+                </a:gridCol>
+                <a:gridCol w="2011680">
+                  <a:extLst>
+                    <a:ext uri="{9D8B030D-6E8A-4147-A177-3AD203B41FA5}">
+                      <a16:colId xmlns:a16="http://schemas.microsoft.com/office/drawing/2014/main" val="20001"/>
+                    </a:ext>
+                  </a:extLst>
+                </a:gridCol>
+                <a:gridCol w="2011680">
+                  <a:extLst>
+                    <a:ext uri="{9D8B030D-6E8A-4147-A177-3AD203B41FA5}">
+                      <a16:colId xmlns:a16="http://schemas.microsoft.com/office/drawing/2014/main" val="20002"/>
+                    </a:ext>
+                  </a:extLst>
+                </a:gridCol>
+                <a:gridCol w="2011680">
+                  <a:extLst>
+                    <a:ext uri="{9D8B030D-6E8A-4147-A177-3AD203B41FA5}">
+                      <a16:colId xmlns:a16="http://schemas.microsoft.com/office/drawing/2014/main" val="20003"/>
+                    </a:ext>
+                  </a:extLst>
+                </a:gridCol>
+                <a:gridCol w="2011680">
+                  <a:extLst>
+                    <a:ext uri="{9D8B030D-6E8A-4147-A177-3AD203B41FA5}">
+                      <a16:colId xmlns:a16="http://schemas.microsoft.com/office/drawing/2014/main" val="20004"/>
+                    </a:ext>
+                  </a:extLst>
+                </a:gridCol>
               </a:tblGrid>
               <a:tr h="365760">
                 <a:tc>
@@ -4190,6 +4260,7 @@
                           <a:latin typeface="Calibri"/>
                         </a:defRPr>
                       </a:pPr>
+                      <a:endParaRPr/>
                     </a:p>
                   </a:txBody>
                   <a:tcPr>
@@ -4294,6 +4365,11 @@
                     </a:solidFill>
                   </a:tcPr>
                 </a:tc>
+                <a:extLst>
+                  <a:ext uri="{0D108BD9-81ED-4DB2-BD59-A6C34878D82A}">
+                    <a16:rowId xmlns:a16="http://schemas.microsoft.com/office/drawing/2014/main" val="10000"/>
+                  </a:ext>
+                </a:extLst>
               </a:tr>
               <a:tr h="365760">
                 <a:tc>
@@ -4381,6 +4457,11 @@
                   </a:txBody>
                   <a:tcPr/>
                 </a:tc>
+                <a:extLst>
+                  <a:ext uri="{0D108BD9-81ED-4DB2-BD59-A6C34878D82A}">
+                    <a16:rowId xmlns:a16="http://schemas.microsoft.com/office/drawing/2014/main" val="10001"/>
+                  </a:ext>
+                </a:extLst>
               </a:tr>
               <a:tr h="365760">
                 <a:tc>
@@ -4488,6 +4569,11 @@
                     </a:solidFill>
                   </a:tcPr>
                 </a:tc>
+                <a:extLst>
+                  <a:ext uri="{0D108BD9-81ED-4DB2-BD59-A6C34878D82A}">
+                    <a16:rowId xmlns:a16="http://schemas.microsoft.com/office/drawing/2014/main" val="10002"/>
+                  </a:ext>
+                </a:extLst>
               </a:tr>
               <a:tr h="365760">
                 <a:tc>
@@ -4575,6 +4661,11 @@
                   </a:txBody>
                   <a:tcPr/>
                 </a:tc>
+                <a:extLst>
+                  <a:ext uri="{0D108BD9-81ED-4DB2-BD59-A6C34878D82A}">
+                    <a16:rowId xmlns:a16="http://schemas.microsoft.com/office/drawing/2014/main" val="10003"/>
+                  </a:ext>
+                </a:extLst>
               </a:tr>
               <a:tr h="365760">
                 <a:tc>
@@ -4609,6 +4700,7 @@
                         </a:defRPr>
                       </a:pPr>
                       <a:r>
+                        <a:rPr dirty="0"/>
                         <a:t>+</a:t>
                       </a:r>
                     </a:p>
@@ -4672,6 +4764,7 @@
                         </a:defRPr>
                       </a:pPr>
                       <a:r>
+                        <a:rPr dirty="0"/>
                         <a:t>+</a:t>
                       </a:r>
                     </a:p>
@@ -4682,6 +4775,11 @@
                     </a:solidFill>
                   </a:tcPr>
                 </a:tc>
+                <a:extLst>
+                  <a:ext uri="{0D108BD9-81ED-4DB2-BD59-A6C34878D82A}">
+                    <a16:rowId xmlns:a16="http://schemas.microsoft.com/office/drawing/2014/main" val="10004"/>
+                  </a:ext>
+                </a:extLst>
               </a:tr>
             </a:tbl>
           </a:graphicData>
@@ -4695,7 +4793,7 @@
         </p:nvSpPr>
         <p:spPr>
           <a:xfrm>
-            <a:off x="548640" y="3383280"/>
+            <a:off x="548640" y="3829848"/>
             <a:ext cx="10972800" cy="365760"/>
           </a:xfrm>
           <a:prstGeom prst="rect">
@@ -4721,6 +4819,7 @@
               </a:defRPr>
             </a:pPr>
             <a:r>
+              <a:rPr dirty="0"/>
               <a:t>Each "+" is an intersection:</a:t>
             </a:r>
           </a:p>
@@ -4737,6 +4836,7 @@
               </a:defRPr>
             </a:pPr>
             <a:r>
+              <a:rPr dirty="0"/>
               <a:t>Lines connecting them horizontally and vertically</a:t>
             </a:r>
           </a:p>
@@ -4753,6 +4853,7 @@
               </a:defRPr>
             </a:pPr>
             <a:r>
+              <a:rPr dirty="0"/>
               <a:t>The robot follows lines between intersections</a:t>
             </a:r>
           </a:p>
@@ -4769,6 +4870,7 @@
               </a:defRPr>
             </a:pPr>
             <a:r>
+              <a:rPr dirty="0"/>
               <a:t>Cross detection tells the robot it has arrived</a:t>
             </a:r>
           </a:p>
@@ -4784,6 +4886,7 @@
                 <a:latin typeface="Calibri"/>
               </a:defRPr>
             </a:pPr>
+            <a:endParaRPr dirty="0"/>
           </a:p>
         </p:txBody>
       </p:sp>
@@ -4796,7 +4899,7 @@
 </file>
 
 <file path=ppt/slides/slide4.xml><?xml version="1.0" encoding="utf-8"?>
-<p:sld xmlns:a="http://schemas.openxmlformats.org/drawingml/2006/main" xmlns:p="http://schemas.openxmlformats.org/presentationml/2006/main" xmlns:r="http://schemas.openxmlformats.org/officeDocument/2006/relationships">
+<p:sld xmlns:a="http://schemas.openxmlformats.org/drawingml/2006/main" xmlns:r="http://schemas.openxmlformats.org/officeDocument/2006/relationships" xmlns:p="http://schemas.openxmlformats.org/presentationml/2006/main">
   <p:cSld>
     <p:spTree>
       <p:nvGrpSpPr>
@@ -4804,7 +4907,14 @@
         <p:cNvGrpSpPr/>
         <p:nvPr/>
       </p:nvGrpSpPr>
-      <p:grpSpPr/>
+      <p:grpSpPr>
+        <a:xfrm>
+          <a:off x="0" y="0"/>
+          <a:ext cx="0" cy="0"/>
+          <a:chOff x="0" y="0"/>
+          <a:chExt cx="0" cy="0"/>
+        </a:xfrm>
+      </p:grpSpPr>
       <p:sp>
         <p:nvSpPr>
           <p:cNvPr id="2" name="Rectangle 1"/>
@@ -4845,6 +4955,7 @@
           <a:lstStyle/>
           <a:p>
             <a:pPr algn="ctr"/>
+            <a:endParaRPr/>
           </a:p>
         </p:txBody>
       </p:sp>
@@ -4981,6 +5092,7 @@
                 <a:latin typeface="Calibri"/>
               </a:defRPr>
             </a:pPr>
+            <a:endParaRPr/>
           </a:p>
           <a:p>
             <a:pPr>
@@ -5026,6 +5138,7 @@
                 <a:latin typeface="Calibri"/>
               </a:defRPr>
             </a:pPr>
+            <a:endParaRPr/>
           </a:p>
         </p:txBody>
       </p:sp>
@@ -5038,7 +5151,7 @@
 </file>
 
 <file path=ppt/slides/slide5.xml><?xml version="1.0" encoding="utf-8"?>
-<p:sld xmlns:a="http://schemas.openxmlformats.org/drawingml/2006/main" xmlns:p="http://schemas.openxmlformats.org/presentationml/2006/main" xmlns:r="http://schemas.openxmlformats.org/officeDocument/2006/relationships">
+<p:sld xmlns:a="http://schemas.openxmlformats.org/drawingml/2006/main" xmlns:r="http://schemas.openxmlformats.org/officeDocument/2006/relationships" xmlns:p="http://schemas.openxmlformats.org/presentationml/2006/main">
   <p:cSld>
     <p:spTree>
       <p:nvGrpSpPr>
@@ -5046,7 +5159,14 @@
         <p:cNvGrpSpPr/>
         <p:nvPr/>
       </p:nvGrpSpPr>
-      <p:grpSpPr/>
+      <p:grpSpPr>
+        <a:xfrm>
+          <a:off x="0" y="0"/>
+          <a:ext cx="0" cy="0"/>
+          <a:chOff x="0" y="0"/>
+          <a:chExt cx="0" cy="0"/>
+        </a:xfrm>
+      </p:grpSpPr>
       <p:sp>
         <p:nvSpPr>
           <p:cNvPr id="2" name="Rectangle 1"/>
@@ -5087,6 +5207,7 @@
           <a:lstStyle/>
           <a:p>
             <a:pPr algn="ctr"/>
+            <a:endParaRPr/>
           </a:p>
         </p:txBody>
       </p:sp>
@@ -5175,6 +5296,7 @@
                 <a:latin typeface="Calibri"/>
               </a:defRPr>
             </a:pPr>
+            <a:endParaRPr/>
           </a:p>
         </p:txBody>
       </p:sp>
@@ -5220,6 +5342,7 @@
           <a:lstStyle/>
           <a:p>
             <a:pPr algn="ctr"/>
+            <a:endParaRPr/>
           </a:p>
         </p:txBody>
       </p:sp>
@@ -5272,6 +5395,7 @@
                 <a:latin typeface="Courier New"/>
               </a:defRPr>
             </a:pPr>
+            <a:endParaRPr/>
           </a:p>
           <a:p>
             <a:pPr>
@@ -5317,6 +5441,7 @@
                 <a:latin typeface="Courier New"/>
               </a:defRPr>
             </a:pPr>
+            <a:endParaRPr/>
           </a:p>
           <a:p>
             <a:pPr>
@@ -5362,6 +5487,7 @@
                 <a:latin typeface="Courier New"/>
               </a:defRPr>
             </a:pPr>
+            <a:endParaRPr/>
           </a:p>
           <a:p>
             <a:pPr>
@@ -5446,6 +5572,7 @@
                 <a:latin typeface="Calibri"/>
               </a:defRPr>
             </a:pPr>
+            <a:endParaRPr/>
           </a:p>
         </p:txBody>
       </p:sp>
@@ -5458,7 +5585,7 @@
 </file>
 
 <file path=ppt/slides/slide6.xml><?xml version="1.0" encoding="utf-8"?>
-<p:sld xmlns:a="http://schemas.openxmlformats.org/drawingml/2006/main" xmlns:p="http://schemas.openxmlformats.org/presentationml/2006/main" xmlns:r="http://schemas.openxmlformats.org/officeDocument/2006/relationships">
+<p:sld xmlns:a="http://schemas.openxmlformats.org/drawingml/2006/main" xmlns:r="http://schemas.openxmlformats.org/officeDocument/2006/relationships" xmlns:p="http://schemas.openxmlformats.org/presentationml/2006/main">
   <p:cSld>
     <p:spTree>
       <p:nvGrpSpPr>
@@ -5466,7 +5593,14 @@
         <p:cNvGrpSpPr/>
         <p:nvPr/>
       </p:nvGrpSpPr>
-      <p:grpSpPr/>
+      <p:grpSpPr>
+        <a:xfrm>
+          <a:off x="0" y="0"/>
+          <a:ext cx="0" cy="0"/>
+          <a:chOff x="0" y="0"/>
+          <a:chExt cx="0" cy="0"/>
+        </a:xfrm>
+      </p:grpSpPr>
       <p:sp>
         <p:nvSpPr>
           <p:cNvPr id="2" name="Rectangle 1"/>
@@ -5507,6 +5641,7 @@
           <a:lstStyle/>
           <a:p>
             <a:pPr algn="ctr"/>
+            <a:endParaRPr/>
           </a:p>
         </p:txBody>
       </p:sp>
@@ -5640,6 +5775,7 @@
           <a:lstStyle/>
           <a:p>
             <a:pPr algn="ctr"/>
+            <a:endParaRPr/>
           </a:p>
         </p:txBody>
       </p:sp>
@@ -5708,6 +5844,7 @@
                 <a:latin typeface="Courier New"/>
               </a:defRPr>
             </a:pPr>
+            <a:endParaRPr/>
           </a:p>
           <a:p>
             <a:pPr>
@@ -5868,7 +6005,7 @@
 </file>
 
 <file path=ppt/slides/slide7.xml><?xml version="1.0" encoding="utf-8"?>
-<p:sld xmlns:a="http://schemas.openxmlformats.org/drawingml/2006/main" xmlns:p="http://schemas.openxmlformats.org/presentationml/2006/main" xmlns:r="http://schemas.openxmlformats.org/officeDocument/2006/relationships">
+<p:sld xmlns:a="http://schemas.openxmlformats.org/drawingml/2006/main" xmlns:r="http://schemas.openxmlformats.org/officeDocument/2006/relationships" xmlns:p="http://schemas.openxmlformats.org/presentationml/2006/main">
   <p:cSld>
     <p:spTree>
       <p:nvGrpSpPr>
@@ -5876,7 +6013,14 @@
         <p:cNvGrpSpPr/>
         <p:nvPr/>
       </p:nvGrpSpPr>
-      <p:grpSpPr/>
+      <p:grpSpPr>
+        <a:xfrm>
+          <a:off x="0" y="0"/>
+          <a:ext cx="0" cy="0"/>
+          <a:chOff x="0" y="0"/>
+          <a:chExt cx="0" cy="0"/>
+        </a:xfrm>
+      </p:grpSpPr>
       <p:sp>
         <p:nvSpPr>
           <p:cNvPr id="2" name="Rectangle 1"/>
@@ -5917,6 +6061,7 @@
           <a:lstStyle/>
           <a:p>
             <a:pPr algn="ctr"/>
+            <a:endParaRPr/>
           </a:p>
         </p:txBody>
       </p:sp>
@@ -6000,7 +6145,7 @@
         </p:nvSpPr>
         <p:spPr>
           <a:xfrm>
-            <a:off x="548640" y="1645920"/>
+            <a:off x="396240" y="1911734"/>
             <a:ext cx="5669280" cy="2560320"/>
           </a:xfrm>
           <a:prstGeom prst="roundRect">
@@ -6034,6 +6179,7 @@
           <a:lstStyle/>
           <a:p>
             <a:pPr algn="ctr"/>
+            <a:endParaRPr/>
           </a:p>
         </p:txBody>
       </p:sp>
@@ -6045,7 +6191,7 @@
         </p:nvSpPr>
         <p:spPr>
           <a:xfrm>
-            <a:off x="731520" y="1737360"/>
+            <a:off x="579120" y="2003174"/>
             <a:ext cx="5303520" cy="2377440"/>
           </a:xfrm>
           <a:prstGeom prst="rect">
@@ -6071,7 +6217,12 @@
               </a:defRPr>
             </a:pPr>
             <a:r>
-              <a:t>board.wait_for_button()</a:t>
+              <a:rPr dirty="0" err="1"/>
+              <a:t>board.wait_for_button</a:t>
+            </a:r>
+            <a:r>
+              <a:rPr dirty="0"/>
+              <a:t>()</a:t>
             </a:r>
           </a:p>
           <a:p>
@@ -6086,6 +6237,7 @@
                 <a:latin typeface="Courier New"/>
               </a:defRPr>
             </a:pPr>
+            <a:endParaRPr dirty="0"/>
           </a:p>
           <a:p>
             <a:pPr>
@@ -6100,7 +6252,12 @@
               </a:defRPr>
             </a:pPr>
             <a:r>
-              <a:t>tracker.track_until_cross()</a:t>
+              <a:rPr dirty="0" err="1"/>
+              <a:t>tracker.track_until_cross</a:t>
+            </a:r>
+            <a:r>
+              <a:rPr dirty="0"/>
+              <a:t>()</a:t>
             </a:r>
           </a:p>
           <a:p>
@@ -6116,6 +6273,7 @@
               </a:defRPr>
             </a:pPr>
             <a:r>
+              <a:rPr dirty="0"/>
               <a:t>print("At intersection!")</a:t>
             </a:r>
           </a:p>
@@ -6131,6 +6289,7 @@
                 <a:latin typeface="Courier New"/>
               </a:defRPr>
             </a:pPr>
+            <a:endParaRPr dirty="0"/>
           </a:p>
           <a:p>
             <a:pPr>
@@ -6145,7 +6304,12 @@
               </a:defRPr>
             </a:pPr>
             <a:r>
-              <a:t>tracker.turn_right()</a:t>
+              <a:rPr dirty="0" err="1"/>
+              <a:t>tracker.turn_right</a:t>
+            </a:r>
+            <a:r>
+              <a:rPr dirty="0"/>
+              <a:t>()</a:t>
             </a:r>
           </a:p>
           <a:p>
@@ -6161,6 +6325,7 @@
               </a:defRPr>
             </a:pPr>
             <a:r>
+              <a:rPr dirty="0"/>
               <a:t>print("Turned right - now on perpendicular line!")</a:t>
             </a:r>
           </a:p>
@@ -6176,6 +6341,7 @@
                 <a:latin typeface="Courier New"/>
               </a:defRPr>
             </a:pPr>
+            <a:endParaRPr dirty="0"/>
           </a:p>
           <a:p>
             <a:pPr>
@@ -6190,7 +6356,12 @@
               </a:defRPr>
             </a:pPr>
             <a:r>
-              <a:t>tracker.track_until_cross()</a:t>
+              <a:rPr dirty="0" err="1"/>
+              <a:t>tracker.track_until_cross</a:t>
+            </a:r>
+            <a:r>
+              <a:rPr dirty="0"/>
+              <a:t>()</a:t>
             </a:r>
           </a:p>
           <a:p>
@@ -6206,6 +6377,7 @@
               </a:defRPr>
             </a:pPr>
             <a:r>
+              <a:rPr dirty="0"/>
               <a:t>print("At next intersection!")</a:t>
             </a:r>
           </a:p>
@@ -6304,7 +6476,7 @@
 </file>
 
 <file path=ppt/slides/slide8.xml><?xml version="1.0" encoding="utf-8"?>
-<p:sld xmlns:a="http://schemas.openxmlformats.org/drawingml/2006/main" xmlns:p="http://schemas.openxmlformats.org/presentationml/2006/main" xmlns:r="http://schemas.openxmlformats.org/officeDocument/2006/relationships">
+<p:sld xmlns:a="http://schemas.openxmlformats.org/drawingml/2006/main" xmlns:r="http://schemas.openxmlformats.org/officeDocument/2006/relationships" xmlns:p="http://schemas.openxmlformats.org/presentationml/2006/main">
   <p:cSld>
     <p:spTree>
       <p:nvGrpSpPr>
@@ -6312,7 +6484,14 @@
         <p:cNvGrpSpPr/>
         <p:nvPr/>
       </p:nvGrpSpPr>
-      <p:grpSpPr/>
+      <p:grpSpPr>
+        <a:xfrm>
+          <a:off x="0" y="0"/>
+          <a:ext cx="0" cy="0"/>
+          <a:chOff x="0" y="0"/>
+          <a:chExt cx="0" cy="0"/>
+        </a:xfrm>
+      </p:grpSpPr>
       <p:sp>
         <p:nvSpPr>
           <p:cNvPr id="2" name="Rectangle 1"/>
@@ -6353,6 +6532,7 @@
           <a:lstStyle/>
           <a:p>
             <a:pPr algn="ctr"/>
+            <a:endParaRPr/>
           </a:p>
         </p:txBody>
       </p:sp>
@@ -6441,6 +6621,7 @@
                 <a:latin typeface="Calibri"/>
               </a:defRPr>
             </a:pPr>
+            <a:endParaRPr/>
           </a:p>
         </p:txBody>
       </p:sp>
@@ -6450,10 +6631,16 @@
           <p:cNvGraphicFramePr>
             <a:graphicFrameLocks noGrp="1"/>
           </p:cNvGraphicFramePr>
-          <p:nvPr/>
+          <p:nvPr>
+            <p:extLst>
+              <p:ext uri="{D42A27DB-BD31-4B8C-83A1-F6EECF244321}">
+                <p14:modId xmlns:p14="http://schemas.microsoft.com/office/powerpoint/2010/main" val="1434195210"/>
+              </p:ext>
+            </p:extLst>
+          </p:nvPr>
         </p:nvGraphicFramePr>
         <p:xfrm>
-          <a:off x="914400" y="1371600"/>
+          <a:off x="548640" y="1917050"/>
           <a:ext cx="10058400" cy="2194560"/>
         </p:xfrm>
         <a:graphic>
@@ -6463,8 +6650,20 @@
                 <a:tableStyleId>{5C22544A-7EE6-4342-B048-85BDC9FD1C3A}</a:tableStyleId>
               </a:tblPr>
               <a:tblGrid>
-                <a:gridCol w="5029200"/>
-                <a:gridCol w="5029200"/>
+                <a:gridCol w="5029200">
+                  <a:extLst>
+                    <a:ext uri="{9D8B030D-6E8A-4147-A177-3AD203B41FA5}">
+                      <a16:colId xmlns:a16="http://schemas.microsoft.com/office/drawing/2014/main" val="20000"/>
+                    </a:ext>
+                  </a:extLst>
+                </a:gridCol>
+                <a:gridCol w="5029200">
+                  <a:extLst>
+                    <a:ext uri="{9D8B030D-6E8A-4147-A177-3AD203B41FA5}">
+                      <a16:colId xmlns:a16="http://schemas.microsoft.com/office/drawing/2014/main" val="20001"/>
+                    </a:ext>
+                  </a:extLst>
+                </a:gridCol>
               </a:tblGrid>
               <a:tr h="365760">
                 <a:tc>
@@ -6481,6 +6680,7 @@
                         </a:defRPr>
                       </a:pPr>
                       <a:r>
+                        <a:rPr dirty="0"/>
                         <a:t>Module 2</a:t>
                       </a:r>
                     </a:p>
@@ -6515,6 +6715,11 @@
                     </a:solidFill>
                   </a:tcPr>
                 </a:tc>
+                <a:extLst>
+                  <a:ext uri="{0D108BD9-81ED-4DB2-BD59-A6C34878D82A}">
+                    <a16:rowId xmlns:a16="http://schemas.microsoft.com/office/drawing/2014/main" val="10000"/>
+                  </a:ext>
+                </a:extLst>
               </a:tr>
               <a:tr h="365760">
                 <a:tc>
@@ -6551,6 +6756,11 @@
                   </a:txBody>
                   <a:tcPr/>
                 </a:tc>
+                <a:extLst>
+                  <a:ext uri="{0D108BD9-81ED-4DB2-BD59-A6C34878D82A}">
+                    <a16:rowId xmlns:a16="http://schemas.microsoft.com/office/drawing/2014/main" val="10001"/>
+                  </a:ext>
+                </a:extLst>
               </a:tr>
               <a:tr h="365760">
                 <a:tc>
@@ -6595,6 +6805,11 @@
                     </a:solidFill>
                   </a:tcPr>
                 </a:tc>
+                <a:extLst>
+                  <a:ext uri="{0D108BD9-81ED-4DB2-BD59-A6C34878D82A}">
+                    <a16:rowId xmlns:a16="http://schemas.microsoft.com/office/drawing/2014/main" val="10002"/>
+                  </a:ext>
+                </a:extLst>
               </a:tr>
               <a:tr h="365760">
                 <a:tc>
@@ -6631,6 +6846,11 @@
                   </a:txBody>
                   <a:tcPr/>
                 </a:tc>
+                <a:extLst>
+                  <a:ext uri="{0D108BD9-81ED-4DB2-BD59-A6C34878D82A}">
+                    <a16:rowId xmlns:a16="http://schemas.microsoft.com/office/drawing/2014/main" val="10003"/>
+                  </a:ext>
+                </a:extLst>
               </a:tr>
               <a:tr h="365760">
                 <a:tc>
@@ -6675,6 +6895,11 @@
                     </a:solidFill>
                   </a:tcPr>
                 </a:tc>
+                <a:extLst>
+                  <a:ext uri="{0D108BD9-81ED-4DB2-BD59-A6C34878D82A}">
+                    <a16:rowId xmlns:a16="http://schemas.microsoft.com/office/drawing/2014/main" val="10004"/>
+                  </a:ext>
+                </a:extLst>
               </a:tr>
               <a:tr h="365760">
                 <a:tc>
@@ -6705,12 +6930,18 @@
                         </a:defRPr>
                       </a:pPr>
                       <a:r>
+                        <a:rPr dirty="0"/>
                         <a:t>Same method, same code!</a:t>
                       </a:r>
                     </a:p>
                   </a:txBody>
                   <a:tcPr/>
                 </a:tc>
+                <a:extLst>
+                  <a:ext uri="{0D108BD9-81ED-4DB2-BD59-A6C34878D82A}">
+                    <a16:rowId xmlns:a16="http://schemas.microsoft.com/office/drawing/2014/main" val="10005"/>
+                  </a:ext>
+                </a:extLst>
               </a:tr>
             </a:tbl>
           </a:graphicData>
@@ -6724,7 +6955,7 @@
         </p:nvSpPr>
         <p:spPr>
           <a:xfrm>
-            <a:off x="548640" y="3749040"/>
+            <a:off x="548640" y="4291300"/>
             <a:ext cx="10972800" cy="365760"/>
           </a:xfrm>
           <a:prstGeom prst="rect">
@@ -6750,6 +6981,7 @@
               </a:defRPr>
             </a:pPr>
             <a:r>
+              <a:rPr dirty="0"/>
               <a:t>Key insight: Good code works in new situations without modification.</a:t>
             </a:r>
           </a:p>
@@ -6765,6 +6997,7 @@
                 <a:latin typeface="Calibri"/>
               </a:defRPr>
             </a:pPr>
+            <a:endParaRPr dirty="0"/>
           </a:p>
         </p:txBody>
       </p:sp>
@@ -6777,7 +7010,7 @@
 </file>
 
 <file path=ppt/slides/slide9.xml><?xml version="1.0" encoding="utf-8"?>
-<p:sld xmlns:a="http://schemas.openxmlformats.org/drawingml/2006/main" xmlns:p="http://schemas.openxmlformats.org/presentationml/2006/main" xmlns:r="http://schemas.openxmlformats.org/officeDocument/2006/relationships">
+<p:sld xmlns:a="http://schemas.openxmlformats.org/drawingml/2006/main" xmlns:r="http://schemas.openxmlformats.org/officeDocument/2006/relationships" xmlns:p="http://schemas.openxmlformats.org/presentationml/2006/main">
   <p:cSld>
     <p:spTree>
       <p:nvGrpSpPr>
@@ -6785,7 +7018,14 @@
         <p:cNvGrpSpPr/>
         <p:nvPr/>
       </p:nvGrpSpPr>
-      <p:grpSpPr/>
+      <p:grpSpPr>
+        <a:xfrm>
+          <a:off x="0" y="0"/>
+          <a:ext cx="0" cy="0"/>
+          <a:chOff x="0" y="0"/>
+          <a:chExt cx="0" cy="0"/>
+        </a:xfrm>
+      </p:grpSpPr>
       <p:sp>
         <p:nvSpPr>
           <p:cNvPr id="2" name="Rectangle 1"/>
@@ -6826,6 +7066,7 @@
           <a:lstStyle/>
           <a:p>
             <a:pPr algn="ctr"/>
+            <a:endParaRPr/>
           </a:p>
         </p:txBody>
       </p:sp>
@@ -6994,6 +7235,7 @@
                 <a:latin typeface="Calibri"/>
               </a:defRPr>
             </a:pPr>
+            <a:endParaRPr/>
           </a:p>
           <a:p>
             <a:pPr>
@@ -7071,6 +7313,7 @@
                 <a:latin typeface="Calibri"/>
               </a:defRPr>
             </a:pPr>
+            <a:endParaRPr/>
           </a:p>
         </p:txBody>
       </p:sp>
